--- a/STARLAB_Slide_Decks_All/19_Final_Reflection_and_Research_Portfolio.pptx
+++ b/STARLAB_Slide_Decks_All/19_Final_Reflection_and_Research_Portfolio.pptx
@@ -2,39 +2,39 @@
 <file path=ppt/presentation.xml><?xml version="1.0" encoding="utf-8"?>
 <p:presentation xmlns:p="http://schemas.openxmlformats.org/presentationml/2006/main" embedTrueTypeFonts="1" saveSubsetFonts="0">
   <p:sldMasterIdLst>
-    <p:sldMasterId xmlns:r="http://schemas.openxmlformats.org/officeDocument/2006/relationships" id="2147483648" r:id="Rc012d99fb3ef4d8d"/>
+    <p:sldMasterId xmlns:r="http://schemas.openxmlformats.org/officeDocument/2006/relationships" id="2147483648" r:id="R63d240c375414cbf"/>
   </p:sldMasterIdLst>
   <p:notesMasterIdLst>
-    <p:notesMasterId xmlns:r="http://schemas.openxmlformats.org/officeDocument/2006/relationships" r:id="Rb870e60854ee44b2"/>
+    <p:notesMasterId xmlns:r="http://schemas.openxmlformats.org/officeDocument/2006/relationships" r:id="Rc7ed727c53424a6a"/>
   </p:notesMasterIdLst>
   <p:sldIdLst>
-    <p:sldId xmlns:r="http://schemas.openxmlformats.org/officeDocument/2006/relationships" id="256" r:id="Rbb21b8bb9308438a"/>
-    <p:sldId xmlns:r="http://schemas.openxmlformats.org/officeDocument/2006/relationships" id="257" r:id="Rf1b83fa7bc884094"/>
-    <p:sldId xmlns:r="http://schemas.openxmlformats.org/officeDocument/2006/relationships" id="258" r:id="Rf510887efda24218"/>
-    <p:sldId xmlns:r="http://schemas.openxmlformats.org/officeDocument/2006/relationships" id="259" r:id="Rb01e21c77d204df3"/>
-    <p:sldId xmlns:r="http://schemas.openxmlformats.org/officeDocument/2006/relationships" id="260" r:id="Redb3aad3c77e4683"/>
-    <p:sldId xmlns:r="http://schemas.openxmlformats.org/officeDocument/2006/relationships" id="261" r:id="R21f9f24fcca244e9"/>
-    <p:sldId xmlns:r="http://schemas.openxmlformats.org/officeDocument/2006/relationships" id="262" r:id="Rae40efa495b14b60"/>
-    <p:sldId xmlns:r="http://schemas.openxmlformats.org/officeDocument/2006/relationships" id="263" r:id="R2fe38699a7a94ea5"/>
-    <p:sldId xmlns:r="http://schemas.openxmlformats.org/officeDocument/2006/relationships" id="264" r:id="Rdd8cc33526c94517"/>
-    <p:sldId xmlns:r="http://schemas.openxmlformats.org/officeDocument/2006/relationships" id="265" r:id="Rf3710f67215945ae"/>
-    <p:sldId xmlns:r="http://schemas.openxmlformats.org/officeDocument/2006/relationships" id="266" r:id="R56c1224f298f4ce7"/>
-    <p:sldId xmlns:r="http://schemas.openxmlformats.org/officeDocument/2006/relationships" id="267" r:id="Re51dd3efbd204cef"/>
-    <p:sldId xmlns:r="http://schemas.openxmlformats.org/officeDocument/2006/relationships" id="268" r:id="Reae2fd84776b4a55"/>
-    <p:sldId xmlns:r="http://schemas.openxmlformats.org/officeDocument/2006/relationships" id="269" r:id="R56f2a5096bc54ce1"/>
-    <p:sldId xmlns:r="http://schemas.openxmlformats.org/officeDocument/2006/relationships" id="270" r:id="Ra129ae6328d34761"/>
-    <p:sldId xmlns:r="http://schemas.openxmlformats.org/officeDocument/2006/relationships" id="271" r:id="R4f1642f0618e48db"/>
-    <p:sldId xmlns:r="http://schemas.openxmlformats.org/officeDocument/2006/relationships" id="272" r:id="Rbd947dffbf6744a9"/>
-    <p:sldId xmlns:r="http://schemas.openxmlformats.org/officeDocument/2006/relationships" id="273" r:id="R38199d7804fb4536"/>
-    <p:sldId xmlns:r="http://schemas.openxmlformats.org/officeDocument/2006/relationships" id="274" r:id="Receefaa369014df6"/>
+    <p:sldId xmlns:r="http://schemas.openxmlformats.org/officeDocument/2006/relationships" id="256" r:id="Re3c9205329d24933"/>
+    <p:sldId xmlns:r="http://schemas.openxmlformats.org/officeDocument/2006/relationships" id="257" r:id="R9e26f20244af406b"/>
+    <p:sldId xmlns:r="http://schemas.openxmlformats.org/officeDocument/2006/relationships" id="258" r:id="Re9c9a31748dd4fd5"/>
+    <p:sldId xmlns:r="http://schemas.openxmlformats.org/officeDocument/2006/relationships" id="259" r:id="Rb383e926736245e8"/>
+    <p:sldId xmlns:r="http://schemas.openxmlformats.org/officeDocument/2006/relationships" id="260" r:id="Re71ee77926554676"/>
+    <p:sldId xmlns:r="http://schemas.openxmlformats.org/officeDocument/2006/relationships" id="261" r:id="Re32f65f040054d97"/>
+    <p:sldId xmlns:r="http://schemas.openxmlformats.org/officeDocument/2006/relationships" id="262" r:id="R6cc01ef1aa1f4620"/>
+    <p:sldId xmlns:r="http://schemas.openxmlformats.org/officeDocument/2006/relationships" id="263" r:id="R8e17adcfd597470f"/>
+    <p:sldId xmlns:r="http://schemas.openxmlformats.org/officeDocument/2006/relationships" id="264" r:id="R5b97813270b04045"/>
+    <p:sldId xmlns:r="http://schemas.openxmlformats.org/officeDocument/2006/relationships" id="265" r:id="Ra8b0e8daba5f463a"/>
+    <p:sldId xmlns:r="http://schemas.openxmlformats.org/officeDocument/2006/relationships" id="266" r:id="Rbfbc77fbd214447a"/>
+    <p:sldId xmlns:r="http://schemas.openxmlformats.org/officeDocument/2006/relationships" id="267" r:id="R1035236f4d474243"/>
+    <p:sldId xmlns:r="http://schemas.openxmlformats.org/officeDocument/2006/relationships" id="268" r:id="R352d5a3635cc4286"/>
+    <p:sldId xmlns:r="http://schemas.openxmlformats.org/officeDocument/2006/relationships" id="269" r:id="R24ce85e3e5c7499f"/>
+    <p:sldId xmlns:r="http://schemas.openxmlformats.org/officeDocument/2006/relationships" id="270" r:id="Rc78348552e5f4f07"/>
+    <p:sldId xmlns:r="http://schemas.openxmlformats.org/officeDocument/2006/relationships" id="271" r:id="R510759f1a5d54931"/>
+    <p:sldId xmlns:r="http://schemas.openxmlformats.org/officeDocument/2006/relationships" id="272" r:id="Ra348bb94d81e4d34"/>
+    <p:sldId xmlns:r="http://schemas.openxmlformats.org/officeDocument/2006/relationships" id="273" r:id="Rd5a3eac788cc4cbb"/>
+    <p:sldId xmlns:r="http://schemas.openxmlformats.org/officeDocument/2006/relationships" id="274" r:id="Rcdd1a6fe1b9b4e02"/>
   </p:sldIdLst>
   <p:sldSz cx="12192000" cy="6858000"/>
   <p:notesSz cx="6858000" cy="9144000"/>
   <p:embeddedFontLst>
     <p:embeddedFont>
       <p:font typeface="Play"/>
-      <p:regular xmlns:r="http://schemas.openxmlformats.org/officeDocument/2006/relationships" r:id="Rd331301e38d34769"/>
-      <p:bold xmlns:r="http://schemas.openxmlformats.org/officeDocument/2006/relationships" r:id="R5cc43f8bcfd345d0"/>
+      <p:regular xmlns:r="http://schemas.openxmlformats.org/officeDocument/2006/relationships" r:id="R839fd78513a24e4c"/>
+      <p:bold xmlns:r="http://schemas.openxmlformats.org/officeDocument/2006/relationships" r:id="R850afb3eb6ae458f"/>
     </p:embeddedFont>
   </p:embeddedFontLst>
   <p:defaultTextStyle>
@@ -650,7 +650,7 @@
               <a:buNone/>
             </a:pPr>
             <a:r>
-              <a:t>- Unit 6 Student Handout 15: Final Research Process Reflection</a:t>
+              <a:t>- Unit 6 Student Handout 15</a:t>
             </a:r>
           </a:p>
           <a:p xmlns:a="http://schemas.openxmlformats.org/drawingml/2006/main">
@@ -664,7 +664,7 @@
               <a:buNone/>
             </a:pPr>
             <a:r>
-              <a:t>- Unit 6 Student Handout 16: STARLAB Portfolio Checklist</a:t>
+              <a:t>- Unit 6 Student Handout 16</a:t>
             </a:r>
           </a:p>
           <a:p xmlns:a="http://schemas.openxmlformats.org/drawingml/2006/main">
@@ -678,7 +678,7 @@
               <a:buNone/>
             </a:pPr>
             <a:r>
-              <a:t>- Unit 6 Student Handout 18: Course Feedback and Legacy Reflection</a:t>
+              <a:t>- Unit 6 Student Handout 18</a:t>
             </a:r>
           </a:p>
           <a:p xmlns:a="http://schemas.openxmlformats.org/drawingml/2006/main">
@@ -720,7 +720,7 @@
               <a:buNone/>
             </a:pPr>
             <a:r>
-              <a:t>- Unit 6 Student Handout 17: Optional Next-Step Plan</a:t>
+              <a:t>- Unit 6 Student Handout 17</a:t>
             </a:r>
           </a:p>
           <a:p xmlns:a="http://schemas.openxmlformats.org/drawingml/2006/main">
@@ -776,7 +776,7 @@
               <a:buNone/>
             </a:pPr>
             <a:r>
-              <a:t>Use this deck for final reflection, portfolio curation, course feedback, responsible archiving, and next-step decisions. This is the final deck; no next deck follows.</a:t>
+              <a:t>Use for final reflection, portfolio curation, course feedback, responsible archiving, and next-step decisions. This is the final deck; no next deck follows.</a:t>
             </a:r>
           </a:p>
         </p:txBody>
@@ -2502,7 +2502,7 @@
   </p:cSld>
   <p:clrMap bg1="lt1" tx1="dk1" bg2="dk2" tx2="lt2" accent1="accent1" accent2="accent2" accent3="accent3" accent4="accent4" accent5="accent5" accent6="accent6" hlink="hlink" folHlink="folHlink"/>
   <p:sldLayoutIdLst>
-    <p:sldLayoutId xmlns:r="http://schemas.openxmlformats.org/officeDocument/2006/relationships" id="2147483649" r:id="R5f4bb7717b624470"/>
+    <p:sldLayoutId xmlns:r="http://schemas.openxmlformats.org/officeDocument/2006/relationships" id="2147483649" r:id="R3bd7ea28b1564fc4"/>
   </p:sldLayoutIdLst>
   <p:hf sldNum="0" hdr="0" ftr="0" dt="0"/>
   <p:txStyles>
@@ -3625,7 +3625,7 @@
           <p:nvPr/>
         </p:nvPicPr>
         <p:blipFill rotWithShape="1">
-          <a:blip xmlns:r="http://schemas.openxmlformats.org/officeDocument/2006/relationships" xmlns:a="http://schemas.openxmlformats.org/drawingml/2006/main" r:embed="Ra51be9e7d66248d4">
+          <a:blip xmlns:r="http://schemas.openxmlformats.org/officeDocument/2006/relationships" xmlns:a="http://schemas.openxmlformats.org/drawingml/2006/main" r:embed="R79f429d7a0434c92">
             <a:alphaModFix/>
           </a:blip>
           <a:srcRect xmlns:a="http://schemas.openxmlformats.org/drawingml/2006/main" l="0" t="0" r="0" b="0"/>
@@ -4528,7 +4528,7 @@
       </p:sp>
       <p:cxnSp>
         <p:nvCxnSpPr>
-          <p:cNvPr id="283" name="Google Shape;270;p12"/>
+          <p:cNvPr id="295" name="Google Shape;270;p12"/>
           <p:cNvCxnSpPr/>
           <p:nvPr/>
         </p:nvCxnSpPr>
@@ -8069,7 +8069,7 @@
       </p:sp>
       <p:cxnSp>
         <p:nvCxnSpPr>
-          <p:cNvPr id="351" name="Google Shape;338;p15"/>
+          <p:cNvPr id="363" name="Google Shape;338;p15"/>
           <p:cNvCxnSpPr/>
           <p:nvPr/>
         </p:nvCxnSpPr>
@@ -11217,7 +11217,7 @@
       </p:sp>
       <p:cxnSp>
         <p:nvCxnSpPr>
-          <p:cNvPr id="414" name="Google Shape;401;p18"/>
+          <p:cNvPr id="426" name="Google Shape;401;p18"/>
           <p:cNvCxnSpPr/>
           <p:nvPr/>
         </p:nvCxnSpPr>
@@ -13869,7 +13869,7 @@
       </p:sp>
       <p:cxnSp>
         <p:nvCxnSpPr>
-          <p:cNvPr id="465" name="Google Shape;452;p20"/>
+          <p:cNvPr id="477" name="Google Shape;452;p20"/>
           <p:cNvCxnSpPr/>
           <p:nvPr/>
         </p:nvCxnSpPr>
@@ -19739,7 +19739,7 @@
       </p:sp>
       <p:cxnSp>
         <p:nvCxnSpPr>
-          <p:cNvPr id="161" name="Google Shape;120;p7"/>
+          <p:cNvPr id="198" name="Google Shape;120;p7"/>
           <p:cNvCxnSpPr/>
           <p:nvPr/>
         </p:nvCxnSpPr>
@@ -19941,7 +19941,7 @@
       </p:sp>
       <p:cxnSp>
         <p:nvCxnSpPr>
-          <p:cNvPr id="165" name="Google Shape;124;p7"/>
+          <p:cNvPr id="202" name="Google Shape;124;p7"/>
           <p:cNvCxnSpPr/>
           <p:nvPr/>
         </p:nvCxnSpPr>
@@ -20143,7 +20143,7 @@
       </p:sp>
       <p:cxnSp>
         <p:nvCxnSpPr>
-          <p:cNvPr id="169" name="Google Shape;128;p7"/>
+          <p:cNvPr id="206" name="Google Shape;128;p7"/>
           <p:cNvCxnSpPr/>
           <p:nvPr/>
         </p:nvCxnSpPr>
@@ -20345,7 +20345,7 @@
       </p:sp>
       <p:cxnSp>
         <p:nvCxnSpPr>
-          <p:cNvPr id="173" name="Google Shape;132;p7"/>
+          <p:cNvPr id="210" name="Google Shape;132;p7"/>
           <p:cNvCxnSpPr/>
           <p:nvPr/>
         </p:nvCxnSpPr>
@@ -20547,7 +20547,7 @@
       </p:sp>
       <p:cxnSp>
         <p:nvCxnSpPr>
-          <p:cNvPr id="177" name="Google Shape;136;p7"/>
+          <p:cNvPr id="214" name="Google Shape;136;p7"/>
           <p:cNvCxnSpPr/>
           <p:nvPr/>
         </p:nvCxnSpPr>
@@ -20749,7 +20749,7 @@
       </p:sp>
       <p:cxnSp>
         <p:nvCxnSpPr>
-          <p:cNvPr id="181" name="Google Shape;140;p7"/>
+          <p:cNvPr id="218" name="Google Shape;140;p7"/>
           <p:cNvCxnSpPr/>
           <p:nvPr/>
         </p:nvCxnSpPr>
@@ -20951,7 +20951,7 @@
       </p:sp>
       <p:cxnSp>
         <p:nvCxnSpPr>
-          <p:cNvPr id="185" name="Google Shape;144;p7"/>
+          <p:cNvPr id="222" name="Google Shape;144;p7"/>
           <p:cNvCxnSpPr/>
           <p:nvPr/>
         </p:nvCxnSpPr>
@@ -21890,7 +21890,7 @@
       </p:sp>
       <p:cxnSp>
         <p:nvCxnSpPr>
-          <p:cNvPr id="178" name="Google Shape;165;p8"/>
+          <p:cNvPr id="190" name="Google Shape;165;p8"/>
           <p:cNvCxnSpPr/>
           <p:nvPr/>
         </p:nvCxnSpPr>
